--- a/RL Final presentation.pptx
+++ b/RL Final presentation.pptx
@@ -11,8 +11,8 @@
     <p:sldId id="256" r:id="rId2"/>
     <p:sldId id="289" r:id="rId3"/>
     <p:sldId id="307" r:id="rId4"/>
-    <p:sldId id="291" r:id="rId5"/>
-    <p:sldId id="290" r:id="rId6"/>
+    <p:sldId id="290" r:id="rId5"/>
+    <p:sldId id="291" r:id="rId6"/>
     <p:sldId id="292" r:id="rId7"/>
     <p:sldId id="293" r:id="rId8"/>
     <p:sldId id="294" r:id="rId9"/>
@@ -2567,14 +2567,14 @@
               </a:spcAft>
               <a:buNone/>
             </a:pPr>
-            <a:endParaRPr/>
+            <a:endParaRPr dirty="0"/>
           </a:p>
         </p:txBody>
       </p:sp>
     </p:spTree>
     <p:extLst>
       <p:ext uri="{BB962C8B-B14F-4D97-AF65-F5344CB8AC3E}">
-        <p14:creationId xmlns:p14="http://schemas.microsoft.com/office/powerpoint/2010/main" val="1227806191"/>
+        <p14:creationId xmlns:p14="http://schemas.microsoft.com/office/powerpoint/2010/main" val="2207266248"/>
       </p:ext>
     </p:extLst>
   </p:cSld>
@@ -2676,14 +2676,14 @@
               </a:spcAft>
               <a:buNone/>
             </a:pPr>
-            <a:endParaRPr dirty="0"/>
+            <a:endParaRPr/>
           </a:p>
         </p:txBody>
       </p:sp>
     </p:spTree>
     <p:extLst>
       <p:ext uri="{BB962C8B-B14F-4D97-AF65-F5344CB8AC3E}">
-        <p14:creationId xmlns:p14="http://schemas.microsoft.com/office/powerpoint/2010/main" val="2207266248"/>
+        <p14:creationId xmlns:p14="http://schemas.microsoft.com/office/powerpoint/2010/main" val="1227806191"/>
       </p:ext>
     </p:extLst>
   </p:cSld>
@@ -9081,8 +9081,28 @@
               <a:buNone/>
             </a:pPr>
             <a:r>
+              <a:rPr lang="en" dirty="0"/>
+              <a:t>M</a:t>
+            </a:r>
+            <a:r>
               <a:rPr lang="en-GB" dirty="0"/>
-              <a:t>SARSA</a:t>
+              <a:t>o</a:t>
+            </a:r>
+            <a:r>
+              <a:rPr lang="en" dirty="0"/>
+              <a:t>nte-Carlo </a:t>
+            </a:r>
+            <a:r>
+              <a:rPr lang="en-GB" dirty="0"/>
+              <a:t>(</a:t>
+            </a:r>
+            <a:r>
+              <a:rPr lang="en" dirty="0"/>
+              <a:t>Every Visit</a:t>
+            </a:r>
+            <a:r>
+              <a:rPr lang="en-GB" dirty="0"/>
+              <a:t>)</a:t>
             </a:r>
             <a:endParaRPr dirty="0">
               <a:solidFill>
@@ -9125,8 +9145,645 @@
           </a:effectLst>
         </p:spPr>
       </p:cxnSp>
-      <mc:AlternateContent xmlns:mc="http://schemas.openxmlformats.org/markup-compatibility/2006" xmlns:a14="http://schemas.microsoft.com/office/drawing/2010/main">
-        <mc:Choice Requires="a14">
+      <mc:AlternateContent xmlns:mc="http://schemas.openxmlformats.org/markup-compatibility/2006">
+        <mc:Choice xmlns:a14="http://schemas.microsoft.com/office/drawing/2010/main" Requires="a14">
+          <p:sp>
+            <p:nvSpPr>
+              <p:cNvPr id="2" name="TextBox 1">
+                <a:extLst>
+                  <a:ext uri="{FF2B5EF4-FFF2-40B4-BE49-F238E27FC236}">
+                    <a16:creationId xmlns:a16="http://schemas.microsoft.com/office/drawing/2014/main" id="{DD686CCE-D2A4-D843-663C-509241C80C8C}"/>
+                  </a:ext>
+                </a:extLst>
+              </p:cNvPr>
+              <p:cNvSpPr txBox="1"/>
+              <p:nvPr/>
+            </p:nvSpPr>
+            <p:spPr>
+              <a:xfrm>
+                <a:off x="380410" y="1006870"/>
+                <a:ext cx="6416630" cy="3785652"/>
+              </a:xfrm>
+              <a:prstGeom prst="rect">
+                <a:avLst/>
+              </a:prstGeom>
+              <a:noFill/>
+            </p:spPr>
+            <p:txBody>
+              <a:bodyPr wrap="square" rtlCol="0">
+                <a:spAutoFit/>
+              </a:bodyPr>
+              <a:lstStyle/>
+              <a:p>
+                <a:r>
+                  <a:rPr lang="en-GB" sz="1600" u="sng" dirty="0">
+                    <a:solidFill>
+                      <a:schemeClr val="bg1"/>
+                    </a:solidFill>
+                  </a:rPr>
+                  <a:t>The Concept (Learn from History):</a:t>
+                </a:r>
+              </a:p>
+              <a:p>
+                <a:r>
+                  <a:rPr lang="en-GB" sz="1600" b="1" dirty="0">
+                    <a:solidFill>
+                      <a:schemeClr val="bg1"/>
+                    </a:solidFill>
+                  </a:rPr>
+                  <a:t>Monte Carlo</a:t>
+                </a:r>
+                <a:r>
+                  <a:rPr lang="en-GB" sz="1600" dirty="0">
+                    <a:solidFill>
+                      <a:schemeClr val="bg1"/>
+                    </a:solidFill>
+                  </a:rPr>
+                  <a:t> agent waits for the </a:t>
+                </a:r>
+                <a:r>
+                  <a:rPr lang="en-GB" sz="1600" b="1" dirty="0">
+                    <a:solidFill>
+                      <a:schemeClr val="bg1"/>
+                    </a:solidFill>
+                  </a:rPr>
+                  <a:t>entire episode</a:t>
+                </a:r>
+                <a:r>
+                  <a:rPr lang="en-GB" sz="1600" dirty="0">
+                    <a:solidFill>
+                      <a:schemeClr val="bg1"/>
+                    </a:solidFill>
+                  </a:rPr>
+                  <a:t> to finish.</a:t>
+                </a:r>
+              </a:p>
+              <a:p>
+                <a:endParaRPr lang="en-GB" sz="1600" dirty="0">
+                  <a:solidFill>
+                    <a:schemeClr val="bg1"/>
+                  </a:solidFill>
+                </a:endParaRPr>
+              </a:p>
+              <a:p>
+                <a:r>
+                  <a:rPr lang="en-GB" sz="1600" dirty="0">
+                    <a:solidFill>
+                      <a:schemeClr val="bg1"/>
+                    </a:solidFill>
+                  </a:rPr>
+                  <a:t>It then looks at the episode in </a:t>
+                </a:r>
+                <a:r>
+                  <a:rPr lang="en-GB" sz="1600" b="1" dirty="0">
+                    <a:solidFill>
+                      <a:schemeClr val="bg1"/>
+                    </a:solidFill>
+                  </a:rPr>
+                  <a:t>reverse</a:t>
+                </a:r>
+                <a:r>
+                  <a:rPr lang="en-GB" sz="1600" dirty="0">
+                    <a:solidFill>
+                      <a:schemeClr val="bg1"/>
+                    </a:solidFill>
+                  </a:rPr>
+                  <a:t> (from end to start) to calculate the total Returns (G) for every decision it made along the way.</a:t>
+                </a:r>
+              </a:p>
+              <a:p>
+                <a:endParaRPr lang="en-GB" sz="1600" dirty="0">
+                  <a:solidFill>
+                    <a:schemeClr val="bg1"/>
+                  </a:solidFill>
+                </a:endParaRPr>
+              </a:p>
+              <a:p>
+                <a:r>
+                  <a:rPr lang="en-GB" sz="1600" dirty="0">
+                    <a:solidFill>
+                      <a:schemeClr val="bg1"/>
+                    </a:solidFill>
+                  </a:rPr>
+                  <a:t>The Update Rule:</a:t>
+                </a:r>
+              </a:p>
+              <a:p>
+                <a:r>
+                  <a:rPr lang="en-GB" sz="1600" dirty="0">
+                    <a:solidFill>
+                      <a:schemeClr val="bg1"/>
+                    </a:solidFill>
+                  </a:rPr>
+                  <a:t>Instead of calculating a simple average of all past returns, we use a Constant</a:t>
+                </a:r>
+                <a:r>
+                  <a:rPr lang="he-IL" sz="1600" dirty="0">
+                    <a:solidFill>
+                      <a:schemeClr val="bg1"/>
+                    </a:solidFill>
+                  </a:rPr>
+                  <a:t> </a:t>
+                </a:r>
+                <a14:m>
+                  <m:oMath xmlns:m="http://schemas.openxmlformats.org/officeDocument/2006/math">
+                    <m:r>
+                      <a:rPr lang="en-GB" sz="1600" b="1" i="1" smtClean="0">
+                        <a:solidFill>
+                          <a:schemeClr val="bg1"/>
+                        </a:solidFill>
+                        <a:latin typeface="Cambria Math" panose="02040503050406030204" pitchFamily="18" charset="0"/>
+                        <a:sym typeface="Wingdings" panose="05000000000000000000" pitchFamily="2" charset="2"/>
+                      </a:rPr>
+                      <m:t>𝜶</m:t>
+                    </m:r>
+                  </m:oMath>
+                </a14:m>
+                <a:r>
+                  <a:rPr lang="en-GB" sz="1600" dirty="0">
+                    <a:solidFill>
+                      <a:schemeClr val="bg1"/>
+                    </a:solidFill>
+                  </a:rPr>
+                  <a:t> update rule:</a:t>
+                </a:r>
+                <a:br>
+                  <a:rPr lang="en-GB" sz="1600" dirty="0">
+                    <a:solidFill>
+                      <a:schemeClr val="bg1"/>
+                    </a:solidFill>
+                  </a:rPr>
+                </a:br>
+                <a:endParaRPr lang="en-GB" sz="1600" dirty="0">
+                  <a:solidFill>
+                    <a:schemeClr val="bg1"/>
+                  </a:solidFill>
+                  <a:sym typeface="Wingdings" panose="05000000000000000000" pitchFamily="2" charset="2"/>
+                </a:endParaRPr>
+              </a:p>
+              <a:p>
+                <a:pPr/>
+                <a14:m>
+                  <m:oMathPara xmlns:m="http://schemas.openxmlformats.org/officeDocument/2006/math">
+                    <m:oMathParaPr>
+                      <m:jc m:val="centerGroup"/>
+                    </m:oMathParaPr>
+                    <m:oMath xmlns:m="http://schemas.openxmlformats.org/officeDocument/2006/math">
+                      <m:r>
+                        <a:rPr lang="en-GB" sz="1600" b="1" i="1" smtClean="0">
+                          <a:solidFill>
+                            <a:schemeClr val="bg1"/>
+                          </a:solidFill>
+                          <a:latin typeface="Cambria Math" panose="02040503050406030204" pitchFamily="18" charset="0"/>
+                          <a:sym typeface="Wingdings" panose="05000000000000000000" pitchFamily="2" charset="2"/>
+                        </a:rPr>
+                        <m:t>𝑸</m:t>
+                      </m:r>
+                      <m:d>
+                        <m:dPr>
+                          <m:ctrlPr>
+                            <a:rPr lang="en-GB" sz="1600" b="1" i="1" smtClean="0">
+                              <a:solidFill>
+                                <a:schemeClr val="bg1"/>
+                              </a:solidFill>
+                              <a:latin typeface="Cambria Math" panose="02040503050406030204" pitchFamily="18" charset="0"/>
+                              <a:sym typeface="Wingdings" panose="05000000000000000000" pitchFamily="2" charset="2"/>
+                            </a:rPr>
+                          </m:ctrlPr>
+                        </m:dPr>
+                        <m:e>
+                          <m:r>
+                            <a:rPr lang="en-GB" sz="1600" b="1" i="1" smtClean="0">
+                              <a:solidFill>
+                                <a:schemeClr val="bg1"/>
+                              </a:solidFill>
+                              <a:latin typeface="Cambria Math" panose="02040503050406030204" pitchFamily="18" charset="0"/>
+                              <a:sym typeface="Wingdings" panose="05000000000000000000" pitchFamily="2" charset="2"/>
+                            </a:rPr>
+                            <m:t>𝑺</m:t>
+                          </m:r>
+                          <m:r>
+                            <a:rPr lang="en-GB" sz="1600" b="1" i="0" smtClean="0">
+                              <a:solidFill>
+                                <a:schemeClr val="bg1"/>
+                              </a:solidFill>
+                              <a:latin typeface="Cambria Math" panose="02040503050406030204" pitchFamily="18" charset="0"/>
+                              <a:sym typeface="Wingdings" panose="05000000000000000000" pitchFamily="2" charset="2"/>
+                            </a:rPr>
+                            <m:t>,</m:t>
+                          </m:r>
+                          <m:r>
+                            <a:rPr lang="en-GB" sz="1600" b="1" i="1" smtClean="0">
+                              <a:solidFill>
+                                <a:schemeClr val="bg1"/>
+                              </a:solidFill>
+                              <a:latin typeface="Cambria Math" panose="02040503050406030204" pitchFamily="18" charset="0"/>
+                              <a:sym typeface="Wingdings" panose="05000000000000000000" pitchFamily="2" charset="2"/>
+                            </a:rPr>
+                            <m:t>𝑨</m:t>
+                          </m:r>
+                        </m:e>
+                      </m:d>
+                      <m:r>
+                        <a:rPr lang="en-GB" sz="1600" b="1" i="0" smtClean="0">
+                          <a:solidFill>
+                            <a:schemeClr val="bg1"/>
+                          </a:solidFill>
+                          <a:latin typeface="Cambria Math" panose="02040503050406030204" pitchFamily="18" charset="0"/>
+                          <a:sym typeface="Wingdings" panose="05000000000000000000" pitchFamily="2" charset="2"/>
+                        </a:rPr>
+                        <m:t>=</m:t>
+                      </m:r>
+                      <m:r>
+                        <a:rPr lang="en-GB" sz="1600" b="1" i="1" smtClean="0">
+                          <a:solidFill>
+                            <a:schemeClr val="bg1"/>
+                          </a:solidFill>
+                          <a:latin typeface="Cambria Math" panose="02040503050406030204" pitchFamily="18" charset="0"/>
+                          <a:sym typeface="Wingdings" panose="05000000000000000000" pitchFamily="2" charset="2"/>
+                        </a:rPr>
+                        <m:t>𝑸</m:t>
+                      </m:r>
+                      <m:d>
+                        <m:dPr>
+                          <m:ctrlPr>
+                            <a:rPr lang="en-GB" sz="1600" b="1" i="1" smtClean="0">
+                              <a:solidFill>
+                                <a:schemeClr val="bg1"/>
+                              </a:solidFill>
+                              <a:latin typeface="Cambria Math" panose="02040503050406030204" pitchFamily="18" charset="0"/>
+                              <a:sym typeface="Wingdings" panose="05000000000000000000" pitchFamily="2" charset="2"/>
+                            </a:rPr>
+                          </m:ctrlPr>
+                        </m:dPr>
+                        <m:e>
+                          <m:r>
+                            <a:rPr lang="en-GB" sz="1600" b="1" i="1" smtClean="0">
+                              <a:solidFill>
+                                <a:schemeClr val="bg1"/>
+                              </a:solidFill>
+                              <a:latin typeface="Cambria Math" panose="02040503050406030204" pitchFamily="18" charset="0"/>
+                              <a:sym typeface="Wingdings" panose="05000000000000000000" pitchFamily="2" charset="2"/>
+                            </a:rPr>
+                            <m:t>𝑺</m:t>
+                          </m:r>
+                          <m:r>
+                            <a:rPr lang="en-GB" sz="1600" b="1" i="0" smtClean="0">
+                              <a:solidFill>
+                                <a:schemeClr val="bg1"/>
+                              </a:solidFill>
+                              <a:latin typeface="Cambria Math" panose="02040503050406030204" pitchFamily="18" charset="0"/>
+                              <a:sym typeface="Wingdings" panose="05000000000000000000" pitchFamily="2" charset="2"/>
+                            </a:rPr>
+                            <m:t>,</m:t>
+                          </m:r>
+                          <m:r>
+                            <a:rPr lang="en-GB" sz="1600" b="1" i="1" smtClean="0">
+                              <a:solidFill>
+                                <a:schemeClr val="bg1"/>
+                              </a:solidFill>
+                              <a:latin typeface="Cambria Math" panose="02040503050406030204" pitchFamily="18" charset="0"/>
+                              <a:sym typeface="Wingdings" panose="05000000000000000000" pitchFamily="2" charset="2"/>
+                            </a:rPr>
+                            <m:t>𝑨</m:t>
+                          </m:r>
+                        </m:e>
+                      </m:d>
+                      <m:r>
+                        <a:rPr lang="en-GB" sz="1600" b="1" i="0" smtClean="0">
+                          <a:solidFill>
+                            <a:schemeClr val="bg1"/>
+                          </a:solidFill>
+                          <a:latin typeface="Cambria Math" panose="02040503050406030204" pitchFamily="18" charset="0"/>
+                          <a:sym typeface="Wingdings" panose="05000000000000000000" pitchFamily="2" charset="2"/>
+                        </a:rPr>
+                        <m:t>+</m:t>
+                      </m:r>
+                      <m:r>
+                        <a:rPr lang="en-GB" sz="1600" b="1" i="1" smtClean="0">
+                          <a:solidFill>
+                            <a:schemeClr val="bg1"/>
+                          </a:solidFill>
+                          <a:latin typeface="Cambria Math" panose="02040503050406030204" pitchFamily="18" charset="0"/>
+                          <a:sym typeface="Wingdings" panose="05000000000000000000" pitchFamily="2" charset="2"/>
+                        </a:rPr>
+                        <m:t>𝜶</m:t>
+                      </m:r>
+                      <m:d>
+                        <m:dPr>
+                          <m:begChr m:val="["/>
+                          <m:endChr m:val="]"/>
+                          <m:ctrlPr>
+                            <a:rPr lang="en-GB" sz="1600" b="1" i="1" smtClean="0">
+                              <a:solidFill>
+                                <a:schemeClr val="bg1"/>
+                              </a:solidFill>
+                              <a:latin typeface="Cambria Math" panose="02040503050406030204" pitchFamily="18" charset="0"/>
+                              <a:sym typeface="Wingdings" panose="05000000000000000000" pitchFamily="2" charset="2"/>
+                            </a:rPr>
+                          </m:ctrlPr>
+                        </m:dPr>
+                        <m:e>
+                          <m:r>
+                            <a:rPr lang="en-GB" sz="1600" b="1" i="1" smtClean="0">
+                              <a:solidFill>
+                                <a:schemeClr val="bg1"/>
+                              </a:solidFill>
+                              <a:latin typeface="Cambria Math" panose="02040503050406030204" pitchFamily="18" charset="0"/>
+                              <a:sym typeface="Wingdings" panose="05000000000000000000" pitchFamily="2" charset="2"/>
+                            </a:rPr>
+                            <m:t>𝑮</m:t>
+                          </m:r>
+                          <m:r>
+                            <a:rPr lang="en-GB" sz="1600" b="1" i="0" smtClean="0">
+                              <a:solidFill>
+                                <a:schemeClr val="bg1"/>
+                              </a:solidFill>
+                              <a:latin typeface="Cambria Math" panose="02040503050406030204" pitchFamily="18" charset="0"/>
+                              <a:sym typeface="Wingdings" panose="05000000000000000000" pitchFamily="2" charset="2"/>
+                            </a:rPr>
+                            <m:t>−</m:t>
+                          </m:r>
+                          <m:r>
+                            <a:rPr lang="en-GB" sz="1600" b="1" i="1" smtClean="0">
+                              <a:solidFill>
+                                <a:schemeClr val="bg1"/>
+                              </a:solidFill>
+                              <a:latin typeface="Cambria Math" panose="02040503050406030204" pitchFamily="18" charset="0"/>
+                              <a:sym typeface="Wingdings" panose="05000000000000000000" pitchFamily="2" charset="2"/>
+                            </a:rPr>
+                            <m:t>𝑸</m:t>
+                          </m:r>
+                          <m:d>
+                            <m:dPr>
+                              <m:ctrlPr>
+                                <a:rPr lang="en-GB" sz="1600" b="1" i="1" smtClean="0">
+                                  <a:solidFill>
+                                    <a:schemeClr val="bg1"/>
+                                  </a:solidFill>
+                                  <a:latin typeface="Cambria Math" panose="02040503050406030204" pitchFamily="18" charset="0"/>
+                                  <a:sym typeface="Wingdings" panose="05000000000000000000" pitchFamily="2" charset="2"/>
+                                </a:rPr>
+                              </m:ctrlPr>
+                            </m:dPr>
+                            <m:e>
+                              <m:r>
+                                <a:rPr lang="en-GB" sz="1600" b="1" i="1" smtClean="0">
+                                  <a:solidFill>
+                                    <a:schemeClr val="bg1"/>
+                                  </a:solidFill>
+                                  <a:latin typeface="Cambria Math" panose="02040503050406030204" pitchFamily="18" charset="0"/>
+                                  <a:sym typeface="Wingdings" panose="05000000000000000000" pitchFamily="2" charset="2"/>
+                                </a:rPr>
+                                <m:t>𝑺</m:t>
+                              </m:r>
+                              <m:r>
+                                <a:rPr lang="en-GB" sz="1600" b="1" i="0" smtClean="0">
+                                  <a:solidFill>
+                                    <a:schemeClr val="bg1"/>
+                                  </a:solidFill>
+                                  <a:latin typeface="Cambria Math" panose="02040503050406030204" pitchFamily="18" charset="0"/>
+                                  <a:sym typeface="Wingdings" panose="05000000000000000000" pitchFamily="2" charset="2"/>
+                                </a:rPr>
+                                <m:t>,</m:t>
+                              </m:r>
+                              <m:r>
+                                <a:rPr lang="en-GB" sz="1600" b="1" i="1" smtClean="0">
+                                  <a:solidFill>
+                                    <a:schemeClr val="bg1"/>
+                                  </a:solidFill>
+                                  <a:latin typeface="Cambria Math" panose="02040503050406030204" pitchFamily="18" charset="0"/>
+                                  <a:sym typeface="Wingdings" panose="05000000000000000000" pitchFamily="2" charset="2"/>
+                                </a:rPr>
+                                <m:t>𝑨</m:t>
+                              </m:r>
+                            </m:e>
+                          </m:d>
+                        </m:e>
+                      </m:d>
+                    </m:oMath>
+                  </m:oMathPara>
+                </a14:m>
+                <a:br>
+                  <a:rPr lang="en-GB" sz="1600" b="1" dirty="0">
+                    <a:solidFill>
+                      <a:schemeClr val="bg1"/>
+                    </a:solidFill>
+                  </a:rPr>
+                </a:br>
+                <a:endParaRPr lang="en-GB" sz="1600" b="1" dirty="0">
+                  <a:solidFill>
+                    <a:schemeClr val="bg1"/>
+                  </a:solidFill>
+                </a:endParaRPr>
+              </a:p>
+              <a:p>
+                <a:br>
+                  <a:rPr lang="en-GB" sz="1600" b="1" dirty="0">
+                    <a:solidFill>
+                      <a:schemeClr val="bg1"/>
+                    </a:solidFill>
+                  </a:rPr>
+                </a:br>
+                <a:r>
+                  <a:rPr lang="en-GB" sz="1600" b="1" dirty="0">
+                    <a:solidFill>
+                      <a:schemeClr val="bg1"/>
+                    </a:solidFill>
+                  </a:rPr>
+                  <a:t>Every-Visit:</a:t>
+                </a:r>
+                <a:r>
+                  <a:rPr lang="en-GB" sz="1600" dirty="0">
+                    <a:solidFill>
+                      <a:schemeClr val="bg1"/>
+                    </a:solidFill>
+                  </a:rPr>
+                  <a:t> We update the Q-value </a:t>
+                </a:r>
+                <a:r>
+                  <a:rPr lang="en-GB" sz="1600" i="1" dirty="0">
+                    <a:solidFill>
+                      <a:schemeClr val="bg1"/>
+                    </a:solidFill>
+                  </a:rPr>
+                  <a:t>every time</a:t>
+                </a:r>
+                <a:r>
+                  <a:rPr lang="en-GB" sz="1600" dirty="0">
+                    <a:solidFill>
+                      <a:schemeClr val="bg1"/>
+                    </a:solidFill>
+                  </a:rPr>
+                  <a:t> a state is visited in the episode, not just the first time.</a:t>
+                </a:r>
+              </a:p>
+              <a:p>
+                <a:endParaRPr lang="en-GB" sz="1600" dirty="0">
+                  <a:solidFill>
+                    <a:schemeClr val="bg1"/>
+                  </a:solidFill>
+                </a:endParaRPr>
+              </a:p>
+            </p:txBody>
+          </p:sp>
+        </mc:Choice>
+        <mc:Fallback>
+          <p:sp>
+            <p:nvSpPr>
+              <p:cNvPr id="2" name="TextBox 1">
+                <a:extLst>
+                  <a:ext uri="{FF2B5EF4-FFF2-40B4-BE49-F238E27FC236}">
+                    <a16:creationId xmlns:a16="http://schemas.microsoft.com/office/drawing/2014/main" id="{DD686CCE-D2A4-D843-663C-509241C80C8C}"/>
+                  </a:ext>
+                </a:extLst>
+              </p:cNvPr>
+              <p:cNvSpPr txBox="1">
+                <a:spLocks noRot="1" noChangeAspect="1" noMove="1" noResize="1" noEditPoints="1" noAdjustHandles="1" noChangeArrowheads="1" noChangeShapeType="1" noTextEdit="1"/>
+              </p:cNvSpPr>
+              <p:nvPr/>
+            </p:nvSpPr>
+            <p:spPr>
+              <a:xfrm>
+                <a:off x="380410" y="1006870"/>
+                <a:ext cx="6416630" cy="3785652"/>
+              </a:xfrm>
+              <a:prstGeom prst="rect">
+                <a:avLst/>
+              </a:prstGeom>
+              <a:blipFill>
+                <a:blip r:embed="rId3"/>
+                <a:stretch>
+                  <a:fillRect l="-475" t="-483" r="-665"/>
+                </a:stretch>
+              </a:blipFill>
+            </p:spPr>
+            <p:txBody>
+              <a:bodyPr/>
+              <a:lstStyle/>
+              <a:p>
+                <a:r>
+                  <a:rPr lang="en-US">
+                    <a:noFill/>
+                  </a:rPr>
+                  <a:t> </a:t>
+                </a:r>
+              </a:p>
+            </p:txBody>
+          </p:sp>
+        </mc:Fallback>
+      </mc:AlternateContent>
+    </p:spTree>
+    <p:extLst>
+      <p:ext uri="{BB962C8B-B14F-4D97-AF65-F5344CB8AC3E}">
+        <p14:creationId xmlns:p14="http://schemas.microsoft.com/office/powerpoint/2010/main" val="4069822394"/>
+      </p:ext>
+    </p:extLst>
+  </p:cSld>
+  <p:clrMapOvr>
+    <a:masterClrMapping/>
+  </p:clrMapOvr>
+</p:sld>
+</file>
+
+<file path=ppt/slides/slide5.xml><?xml version="1.0" encoding="utf-8"?>
+<p:sld xmlns:a="http://schemas.openxmlformats.org/drawingml/2006/main" xmlns:r="http://schemas.openxmlformats.org/officeDocument/2006/relationships" xmlns:p="http://schemas.openxmlformats.org/presentationml/2006/main">
+  <p:cSld>
+    <p:spTree>
+      <p:nvGrpSpPr>
+        <p:cNvPr id="1" name="Shape 213"/>
+        <p:cNvGrpSpPr/>
+        <p:nvPr/>
+      </p:nvGrpSpPr>
+      <p:grpSpPr>
+        <a:xfrm>
+          <a:off x="0" y="0"/>
+          <a:ext cx="0" cy="0"/>
+          <a:chOff x="0" y="0"/>
+          <a:chExt cx="0" cy="0"/>
+        </a:xfrm>
+      </p:grpSpPr>
+      <p:sp>
+        <p:nvSpPr>
+          <p:cNvPr id="214" name="Google Shape;214;p44"/>
+          <p:cNvSpPr txBox="1">
+            <a:spLocks noGrp="1"/>
+          </p:cNvSpPr>
+          <p:nvPr>
+            <p:ph type="title"/>
+          </p:nvPr>
+        </p:nvSpPr>
+        <p:spPr>
+          <a:xfrm>
+            <a:off x="938500" y="445025"/>
+            <a:ext cx="4629300" cy="941400"/>
+          </a:xfrm>
+          <a:prstGeom prst="rect">
+            <a:avLst/>
+          </a:prstGeom>
+        </p:spPr>
+        <p:txBody>
+          <a:bodyPr spcFirstLastPara="1" wrap="square" lIns="91425" tIns="91425" rIns="91425" bIns="91425" anchor="t" anchorCtr="0">
+            <a:noAutofit/>
+          </a:bodyPr>
+          <a:lstStyle/>
+          <a:p>
+            <a:pPr marL="0" lvl="0" indent="0" algn="l" rtl="0">
+              <a:spcBef>
+                <a:spcPts val="0"/>
+              </a:spcBef>
+              <a:spcAft>
+                <a:spcPts val="0"/>
+              </a:spcAft>
+              <a:buNone/>
+            </a:pPr>
+            <a:r>
+              <a:rPr lang="en-GB" dirty="0"/>
+              <a:t>SARSA</a:t>
+            </a:r>
+            <a:endParaRPr dirty="0">
+              <a:solidFill>
+                <a:schemeClr val="accent1"/>
+              </a:solidFill>
+            </a:endParaRPr>
+          </a:p>
+        </p:txBody>
+      </p:sp>
+      <p:cxnSp>
+        <p:nvCxnSpPr>
+          <p:cNvPr id="216" name="Google Shape;216;p44"/>
+          <p:cNvCxnSpPr/>
+          <p:nvPr/>
+        </p:nvCxnSpPr>
+        <p:spPr>
+          <a:xfrm>
+            <a:off x="1026200" y="414022"/>
+            <a:ext cx="2763000" cy="0"/>
+          </a:xfrm>
+          <a:prstGeom prst="straightConnector1">
+            <a:avLst/>
+          </a:prstGeom>
+          <a:noFill/>
+          <a:ln w="9525" cap="flat" cmpd="sng">
+            <a:solidFill>
+              <a:schemeClr val="accent1"/>
+            </a:solidFill>
+            <a:prstDash val="solid"/>
+            <a:round/>
+            <a:headEnd type="none" w="med" len="med"/>
+            <a:tailEnd type="none" w="med" len="med"/>
+          </a:ln>
+          <a:effectLst>
+            <a:outerShdw blurRad="57150" dist="19050" dir="5400000" algn="bl" rotWithShape="0">
+              <a:srgbClr val="FFFFFF">
+                <a:alpha val="50000"/>
+              </a:srgbClr>
+            </a:outerShdw>
+          </a:effectLst>
+        </p:spPr>
+      </p:cxnSp>
+      <mc:AlternateContent xmlns:mc="http://schemas.openxmlformats.org/markup-compatibility/2006">
+        <mc:Choice xmlns:a14="http://schemas.microsoft.com/office/drawing/2010/main" Requires="a14">
           <p:sp>
             <p:nvSpPr>
               <p:cNvPr id="2" name="TextBox 1">
@@ -9142,7 +9799,7 @@
             <p:spPr>
               <a:xfrm>
                 <a:off x="426720" y="1030025"/>
-                <a:ext cx="6461760" cy="4524315"/>
+                <a:ext cx="6461760" cy="4031873"/>
               </a:xfrm>
               <a:prstGeom prst="rect">
                 <a:avLst/>
@@ -9718,40 +10375,6 @@
                     </a:solidFill>
                   </a:rPr>
                 </a:br>
-                <a:r>
-                  <a:rPr lang="en-GB" sz="1600" b="1" dirty="0">
-                    <a:solidFill>
-                      <a:schemeClr val="bg1"/>
-                    </a:solidFill>
-                  </a:rPr>
-                  <a:t>On-Policy:</a:t>
-                </a:r>
-                <a:r>
-                  <a:rPr lang="en-GB" sz="1600" dirty="0">
-                    <a:solidFill>
-                      <a:schemeClr val="bg1"/>
-                    </a:solidFill>
-                  </a:rPr>
-                  <a:t> This makes SARSA "safe" or realistic. It learns based on what it </a:t>
-                </a:r>
-                <a:r>
-                  <a:rPr lang="en-GB" sz="1600" i="1" dirty="0">
-                    <a:solidFill>
-                      <a:schemeClr val="bg1"/>
-                    </a:solidFill>
-                  </a:rPr>
-                  <a:t>actually</a:t>
-                </a:r>
-                <a:r>
-                  <a:rPr lang="en-GB" sz="1600" dirty="0">
-                    <a:solidFill>
-                      <a:schemeClr val="bg1"/>
-                    </a:solidFill>
-                  </a:rPr>
-                  <a:t> does, not just assuming it will play perfectly.</a:t>
-                </a:r>
-              </a:p>
-              <a:p>
                 <a:endParaRPr lang="en-GB" sz="1600" dirty="0">
                   <a:solidFill>
                     <a:schemeClr val="bg1"/>
@@ -9782,7 +10405,7 @@
             </p:txBody>
           </p:sp>
         </mc:Choice>
-        <mc:Fallback xmlns="">
+        <mc:Fallback>
           <p:sp>
             <p:nvSpPr>
               <p:cNvPr id="2" name="TextBox 1">
@@ -9800,7 +10423,7 @@
             <p:spPr>
               <a:xfrm>
                 <a:off x="426720" y="1030025"/>
-                <a:ext cx="6461760" cy="4524315"/>
+                <a:ext cx="6461760" cy="4031873"/>
               </a:xfrm>
               <a:prstGeom prst="rect">
                 <a:avLst/>
@@ -9808,7 +10431,7 @@
               <a:blipFill>
                 <a:blip r:embed="rId3"/>
                 <a:stretch>
-                  <a:fillRect l="-472" t="-404"/>
+                  <a:fillRect l="-472" t="-454"/>
                 </a:stretch>
               </a:blipFill>
             </p:spPr>
@@ -9817,7 +10440,7 @@
               <a:lstStyle/>
               <a:p>
                 <a:r>
-                  <a:rPr lang="en-GB">
+                  <a:rPr lang="en-US">
                     <a:noFill/>
                   </a:rPr>
                   <a:t> </a:t>
@@ -9831,663 +10454,6 @@
     <p:extLst>
       <p:ext uri="{BB962C8B-B14F-4D97-AF65-F5344CB8AC3E}">
         <p14:creationId xmlns:p14="http://schemas.microsoft.com/office/powerpoint/2010/main" val="633611110"/>
-      </p:ext>
-    </p:extLst>
-  </p:cSld>
-  <p:clrMapOvr>
-    <a:masterClrMapping/>
-  </p:clrMapOvr>
-</p:sld>
-</file>
-
-<file path=ppt/slides/slide5.xml><?xml version="1.0" encoding="utf-8"?>
-<p:sld xmlns:a="http://schemas.openxmlformats.org/drawingml/2006/main" xmlns:r="http://schemas.openxmlformats.org/officeDocument/2006/relationships" xmlns:p="http://schemas.openxmlformats.org/presentationml/2006/main">
-  <p:cSld>
-    <p:spTree>
-      <p:nvGrpSpPr>
-        <p:cNvPr id="1" name="Shape 213"/>
-        <p:cNvGrpSpPr/>
-        <p:nvPr/>
-      </p:nvGrpSpPr>
-      <p:grpSpPr>
-        <a:xfrm>
-          <a:off x="0" y="0"/>
-          <a:ext cx="0" cy="0"/>
-          <a:chOff x="0" y="0"/>
-          <a:chExt cx="0" cy="0"/>
-        </a:xfrm>
-      </p:grpSpPr>
-      <p:sp>
-        <p:nvSpPr>
-          <p:cNvPr id="214" name="Google Shape;214;p44"/>
-          <p:cNvSpPr txBox="1">
-            <a:spLocks noGrp="1"/>
-          </p:cNvSpPr>
-          <p:nvPr>
-            <p:ph type="title"/>
-          </p:nvPr>
-        </p:nvSpPr>
-        <p:spPr>
-          <a:xfrm>
-            <a:off x="938500" y="445025"/>
-            <a:ext cx="4629300" cy="941400"/>
-          </a:xfrm>
-          <a:prstGeom prst="rect">
-            <a:avLst/>
-          </a:prstGeom>
-        </p:spPr>
-        <p:txBody>
-          <a:bodyPr spcFirstLastPara="1" wrap="square" lIns="91425" tIns="91425" rIns="91425" bIns="91425" anchor="t" anchorCtr="0">
-            <a:noAutofit/>
-          </a:bodyPr>
-          <a:lstStyle/>
-          <a:p>
-            <a:pPr marL="0" lvl="0" indent="0" algn="l" rtl="0">
-              <a:spcBef>
-                <a:spcPts val="0"/>
-              </a:spcBef>
-              <a:spcAft>
-                <a:spcPts val="0"/>
-              </a:spcAft>
-              <a:buNone/>
-            </a:pPr>
-            <a:r>
-              <a:rPr lang="en" dirty="0"/>
-              <a:t>M</a:t>
-            </a:r>
-            <a:r>
-              <a:rPr lang="en-GB" dirty="0"/>
-              <a:t>o</a:t>
-            </a:r>
-            <a:r>
-              <a:rPr lang="en" dirty="0"/>
-              <a:t>nte-Carlo </a:t>
-            </a:r>
-            <a:r>
-              <a:rPr lang="en-GB" dirty="0"/>
-              <a:t>(</a:t>
-            </a:r>
-            <a:r>
-              <a:rPr lang="en" dirty="0"/>
-              <a:t>Every Visit</a:t>
-            </a:r>
-            <a:r>
-              <a:rPr lang="en-GB" dirty="0"/>
-              <a:t>)</a:t>
-            </a:r>
-            <a:endParaRPr dirty="0">
-              <a:solidFill>
-                <a:schemeClr val="accent1"/>
-              </a:solidFill>
-            </a:endParaRPr>
-          </a:p>
-        </p:txBody>
-      </p:sp>
-      <p:cxnSp>
-        <p:nvCxnSpPr>
-          <p:cNvPr id="216" name="Google Shape;216;p44"/>
-          <p:cNvCxnSpPr/>
-          <p:nvPr/>
-        </p:nvCxnSpPr>
-        <p:spPr>
-          <a:xfrm>
-            <a:off x="1026200" y="414022"/>
-            <a:ext cx="2763000" cy="0"/>
-          </a:xfrm>
-          <a:prstGeom prst="straightConnector1">
-            <a:avLst/>
-          </a:prstGeom>
-          <a:noFill/>
-          <a:ln w="9525" cap="flat" cmpd="sng">
-            <a:solidFill>
-              <a:schemeClr val="accent1"/>
-            </a:solidFill>
-            <a:prstDash val="solid"/>
-            <a:round/>
-            <a:headEnd type="none" w="med" len="med"/>
-            <a:tailEnd type="none" w="med" len="med"/>
-          </a:ln>
-          <a:effectLst>
-            <a:outerShdw blurRad="57150" dist="19050" dir="5400000" algn="bl" rotWithShape="0">
-              <a:srgbClr val="FFFFFF">
-                <a:alpha val="50000"/>
-              </a:srgbClr>
-            </a:outerShdw>
-          </a:effectLst>
-        </p:spPr>
-      </p:cxnSp>
-      <mc:AlternateContent xmlns:mc="http://schemas.openxmlformats.org/markup-compatibility/2006" xmlns:a14="http://schemas.microsoft.com/office/drawing/2010/main">
-        <mc:Choice Requires="a14">
-          <p:sp>
-            <p:nvSpPr>
-              <p:cNvPr id="2" name="TextBox 1">
-                <a:extLst>
-                  <a:ext uri="{FF2B5EF4-FFF2-40B4-BE49-F238E27FC236}">
-                    <a16:creationId xmlns:a16="http://schemas.microsoft.com/office/drawing/2014/main" id="{DD686CCE-D2A4-D843-663C-509241C80C8C}"/>
-                  </a:ext>
-                </a:extLst>
-              </p:cNvPr>
-              <p:cNvSpPr txBox="1"/>
-              <p:nvPr/>
-            </p:nvSpPr>
-            <p:spPr>
-              <a:xfrm>
-                <a:off x="380410" y="1006870"/>
-                <a:ext cx="6416630" cy="3785652"/>
-              </a:xfrm>
-              <a:prstGeom prst="rect">
-                <a:avLst/>
-              </a:prstGeom>
-              <a:noFill/>
-            </p:spPr>
-            <p:txBody>
-              <a:bodyPr wrap="square" rtlCol="0">
-                <a:spAutoFit/>
-              </a:bodyPr>
-              <a:lstStyle/>
-              <a:p>
-                <a:r>
-                  <a:rPr lang="en-GB" sz="1600" u="sng" dirty="0">
-                    <a:solidFill>
-                      <a:schemeClr val="bg1"/>
-                    </a:solidFill>
-                  </a:rPr>
-                  <a:t>The Concept (Learn from History):</a:t>
-                </a:r>
-              </a:p>
-              <a:p>
-                <a:r>
-                  <a:rPr lang="en-GB" sz="1600" b="1" dirty="0">
-                    <a:solidFill>
-                      <a:schemeClr val="bg1"/>
-                    </a:solidFill>
-                  </a:rPr>
-                  <a:t>Monte Carlo</a:t>
-                </a:r>
-                <a:r>
-                  <a:rPr lang="en-GB" sz="1600" dirty="0">
-                    <a:solidFill>
-                      <a:schemeClr val="bg1"/>
-                    </a:solidFill>
-                  </a:rPr>
-                  <a:t> agent waits for the </a:t>
-                </a:r>
-                <a:r>
-                  <a:rPr lang="en-GB" sz="1600" b="1" dirty="0">
-                    <a:solidFill>
-                      <a:schemeClr val="bg1"/>
-                    </a:solidFill>
-                  </a:rPr>
-                  <a:t>entire episode</a:t>
-                </a:r>
-                <a:r>
-                  <a:rPr lang="en-GB" sz="1600" dirty="0">
-                    <a:solidFill>
-                      <a:schemeClr val="bg1"/>
-                    </a:solidFill>
-                  </a:rPr>
-                  <a:t> to finish.</a:t>
-                </a:r>
-              </a:p>
-              <a:p>
-                <a:endParaRPr lang="en-GB" sz="1600" dirty="0">
-                  <a:solidFill>
-                    <a:schemeClr val="bg1"/>
-                  </a:solidFill>
-                </a:endParaRPr>
-              </a:p>
-              <a:p>
-                <a:r>
-                  <a:rPr lang="en-GB" sz="1600" dirty="0">
-                    <a:solidFill>
-                      <a:schemeClr val="bg1"/>
-                    </a:solidFill>
-                  </a:rPr>
-                  <a:t>It then looks at the episode in </a:t>
-                </a:r>
-                <a:r>
-                  <a:rPr lang="en-GB" sz="1600" b="1" dirty="0">
-                    <a:solidFill>
-                      <a:schemeClr val="bg1"/>
-                    </a:solidFill>
-                  </a:rPr>
-                  <a:t>reverse</a:t>
-                </a:r>
-                <a:r>
-                  <a:rPr lang="en-GB" sz="1600" dirty="0">
-                    <a:solidFill>
-                      <a:schemeClr val="bg1"/>
-                    </a:solidFill>
-                  </a:rPr>
-                  <a:t> (from end to start) to calculate the total Returns (G) for every decision it made along the way.</a:t>
-                </a:r>
-              </a:p>
-              <a:p>
-                <a:endParaRPr lang="en-GB" sz="1600" dirty="0">
-                  <a:solidFill>
-                    <a:schemeClr val="bg1"/>
-                  </a:solidFill>
-                </a:endParaRPr>
-              </a:p>
-              <a:p>
-                <a:r>
-                  <a:rPr lang="en-GB" sz="1600" dirty="0">
-                    <a:solidFill>
-                      <a:schemeClr val="bg1"/>
-                    </a:solidFill>
-                  </a:rPr>
-                  <a:t>The Update Rule:</a:t>
-                </a:r>
-              </a:p>
-              <a:p>
-                <a:r>
-                  <a:rPr lang="en-GB" sz="1600" dirty="0">
-                    <a:solidFill>
-                      <a:schemeClr val="bg1"/>
-                    </a:solidFill>
-                  </a:rPr>
-                  <a:t>Instead of calculating a simple average of all past returns (Theoretical approach), we use a Constant</a:t>
-                </a:r>
-                <a:r>
-                  <a:rPr lang="he-IL" sz="1600" dirty="0">
-                    <a:solidFill>
-                      <a:schemeClr val="bg1"/>
-                    </a:solidFill>
-                  </a:rPr>
-                  <a:t> </a:t>
-                </a:r>
-                <a14:m>
-                  <m:oMath xmlns:m="http://schemas.openxmlformats.org/officeDocument/2006/math">
-                    <m:r>
-                      <a:rPr lang="en-GB" sz="1600" b="1" i="1" smtClean="0">
-                        <a:solidFill>
-                          <a:schemeClr val="bg1"/>
-                        </a:solidFill>
-                        <a:latin typeface="Cambria Math" panose="02040503050406030204" pitchFamily="18" charset="0"/>
-                        <a:sym typeface="Wingdings" panose="05000000000000000000" pitchFamily="2" charset="2"/>
-                      </a:rPr>
-                      <m:t>𝜶</m:t>
-                    </m:r>
-                  </m:oMath>
-                </a14:m>
-                <a:r>
-                  <a:rPr lang="en-GB" sz="1600" dirty="0">
-                    <a:solidFill>
-                      <a:schemeClr val="bg1"/>
-                    </a:solidFill>
-                  </a:rPr>
-                  <a:t> update rule:</a:t>
-                </a:r>
-                <a:br>
-                  <a:rPr lang="en-GB" sz="1600" dirty="0">
-                    <a:solidFill>
-                      <a:schemeClr val="bg1"/>
-                    </a:solidFill>
-                  </a:rPr>
-                </a:br>
-                <a:endParaRPr lang="en-GB" sz="1600" dirty="0">
-                  <a:solidFill>
-                    <a:schemeClr val="bg1"/>
-                  </a:solidFill>
-                  <a:sym typeface="Wingdings" panose="05000000000000000000" pitchFamily="2" charset="2"/>
-                </a:endParaRPr>
-              </a:p>
-              <a:p>
-                <a:pPr/>
-                <a14:m>
-                  <m:oMathPara xmlns:m="http://schemas.openxmlformats.org/officeDocument/2006/math">
-                    <m:oMathParaPr>
-                      <m:jc m:val="centerGroup"/>
-                    </m:oMathParaPr>
-                    <m:oMath xmlns:m="http://schemas.openxmlformats.org/officeDocument/2006/math">
-                      <m:r>
-                        <a:rPr lang="en-GB" sz="1600" b="1" i="1" smtClean="0">
-                          <a:solidFill>
-                            <a:schemeClr val="bg1"/>
-                          </a:solidFill>
-                          <a:latin typeface="Cambria Math" panose="02040503050406030204" pitchFamily="18" charset="0"/>
-                          <a:sym typeface="Wingdings" panose="05000000000000000000" pitchFamily="2" charset="2"/>
-                        </a:rPr>
-                        <m:t>𝑸</m:t>
-                      </m:r>
-                      <m:d>
-                        <m:dPr>
-                          <m:ctrlPr>
-                            <a:rPr lang="en-GB" sz="1600" b="1" i="1" smtClean="0">
-                              <a:solidFill>
-                                <a:schemeClr val="bg1"/>
-                              </a:solidFill>
-                              <a:latin typeface="Cambria Math" panose="02040503050406030204" pitchFamily="18" charset="0"/>
-                              <a:sym typeface="Wingdings" panose="05000000000000000000" pitchFamily="2" charset="2"/>
-                            </a:rPr>
-                          </m:ctrlPr>
-                        </m:dPr>
-                        <m:e>
-                          <m:r>
-                            <a:rPr lang="en-GB" sz="1600" b="1" i="1" smtClean="0">
-                              <a:solidFill>
-                                <a:schemeClr val="bg1"/>
-                              </a:solidFill>
-                              <a:latin typeface="Cambria Math" panose="02040503050406030204" pitchFamily="18" charset="0"/>
-                              <a:sym typeface="Wingdings" panose="05000000000000000000" pitchFamily="2" charset="2"/>
-                            </a:rPr>
-                            <m:t>𝑺</m:t>
-                          </m:r>
-                          <m:r>
-                            <a:rPr lang="en-GB" sz="1600" b="1" i="0" smtClean="0">
-                              <a:solidFill>
-                                <a:schemeClr val="bg1"/>
-                              </a:solidFill>
-                              <a:latin typeface="Cambria Math" panose="02040503050406030204" pitchFamily="18" charset="0"/>
-                              <a:sym typeface="Wingdings" panose="05000000000000000000" pitchFamily="2" charset="2"/>
-                            </a:rPr>
-                            <m:t>,</m:t>
-                          </m:r>
-                          <m:r>
-                            <a:rPr lang="en-GB" sz="1600" b="1" i="1" smtClean="0">
-                              <a:solidFill>
-                                <a:schemeClr val="bg1"/>
-                              </a:solidFill>
-                              <a:latin typeface="Cambria Math" panose="02040503050406030204" pitchFamily="18" charset="0"/>
-                              <a:sym typeface="Wingdings" panose="05000000000000000000" pitchFamily="2" charset="2"/>
-                            </a:rPr>
-                            <m:t>𝑨</m:t>
-                          </m:r>
-                        </m:e>
-                      </m:d>
-                      <m:r>
-                        <a:rPr lang="en-GB" sz="1600" b="1" i="0" smtClean="0">
-                          <a:solidFill>
-                            <a:schemeClr val="bg1"/>
-                          </a:solidFill>
-                          <a:latin typeface="Cambria Math" panose="02040503050406030204" pitchFamily="18" charset="0"/>
-                          <a:sym typeface="Wingdings" panose="05000000000000000000" pitchFamily="2" charset="2"/>
-                        </a:rPr>
-                        <m:t>=</m:t>
-                      </m:r>
-                      <m:r>
-                        <a:rPr lang="en-GB" sz="1600" b="1" i="1" smtClean="0">
-                          <a:solidFill>
-                            <a:schemeClr val="bg1"/>
-                          </a:solidFill>
-                          <a:latin typeface="Cambria Math" panose="02040503050406030204" pitchFamily="18" charset="0"/>
-                          <a:sym typeface="Wingdings" panose="05000000000000000000" pitchFamily="2" charset="2"/>
-                        </a:rPr>
-                        <m:t>𝑸</m:t>
-                      </m:r>
-                      <m:d>
-                        <m:dPr>
-                          <m:ctrlPr>
-                            <a:rPr lang="en-GB" sz="1600" b="1" i="1" smtClean="0">
-                              <a:solidFill>
-                                <a:schemeClr val="bg1"/>
-                              </a:solidFill>
-                              <a:latin typeface="Cambria Math" panose="02040503050406030204" pitchFamily="18" charset="0"/>
-                              <a:sym typeface="Wingdings" panose="05000000000000000000" pitchFamily="2" charset="2"/>
-                            </a:rPr>
-                          </m:ctrlPr>
-                        </m:dPr>
-                        <m:e>
-                          <m:r>
-                            <a:rPr lang="en-GB" sz="1600" b="1" i="1" smtClean="0">
-                              <a:solidFill>
-                                <a:schemeClr val="bg1"/>
-                              </a:solidFill>
-                              <a:latin typeface="Cambria Math" panose="02040503050406030204" pitchFamily="18" charset="0"/>
-                              <a:sym typeface="Wingdings" panose="05000000000000000000" pitchFamily="2" charset="2"/>
-                            </a:rPr>
-                            <m:t>𝑺</m:t>
-                          </m:r>
-                          <m:r>
-                            <a:rPr lang="en-GB" sz="1600" b="1" i="0" smtClean="0">
-                              <a:solidFill>
-                                <a:schemeClr val="bg1"/>
-                              </a:solidFill>
-                              <a:latin typeface="Cambria Math" panose="02040503050406030204" pitchFamily="18" charset="0"/>
-                              <a:sym typeface="Wingdings" panose="05000000000000000000" pitchFamily="2" charset="2"/>
-                            </a:rPr>
-                            <m:t>,</m:t>
-                          </m:r>
-                          <m:r>
-                            <a:rPr lang="en-GB" sz="1600" b="1" i="1" smtClean="0">
-                              <a:solidFill>
-                                <a:schemeClr val="bg1"/>
-                              </a:solidFill>
-                              <a:latin typeface="Cambria Math" panose="02040503050406030204" pitchFamily="18" charset="0"/>
-                              <a:sym typeface="Wingdings" panose="05000000000000000000" pitchFamily="2" charset="2"/>
-                            </a:rPr>
-                            <m:t>𝑨</m:t>
-                          </m:r>
-                        </m:e>
-                      </m:d>
-                      <m:r>
-                        <a:rPr lang="en-GB" sz="1600" b="1" i="0" smtClean="0">
-                          <a:solidFill>
-                            <a:schemeClr val="bg1"/>
-                          </a:solidFill>
-                          <a:latin typeface="Cambria Math" panose="02040503050406030204" pitchFamily="18" charset="0"/>
-                          <a:sym typeface="Wingdings" panose="05000000000000000000" pitchFamily="2" charset="2"/>
-                        </a:rPr>
-                        <m:t>+</m:t>
-                      </m:r>
-                      <m:r>
-                        <a:rPr lang="en-GB" sz="1600" b="1" i="1" smtClean="0">
-                          <a:solidFill>
-                            <a:schemeClr val="bg1"/>
-                          </a:solidFill>
-                          <a:latin typeface="Cambria Math" panose="02040503050406030204" pitchFamily="18" charset="0"/>
-                          <a:sym typeface="Wingdings" panose="05000000000000000000" pitchFamily="2" charset="2"/>
-                        </a:rPr>
-                        <m:t>𝜶</m:t>
-                      </m:r>
-                      <m:d>
-                        <m:dPr>
-                          <m:begChr m:val="["/>
-                          <m:endChr m:val="]"/>
-                          <m:ctrlPr>
-                            <a:rPr lang="en-GB" sz="1600" b="1" i="1" smtClean="0">
-                              <a:solidFill>
-                                <a:schemeClr val="bg1"/>
-                              </a:solidFill>
-                              <a:latin typeface="Cambria Math" panose="02040503050406030204" pitchFamily="18" charset="0"/>
-                              <a:sym typeface="Wingdings" panose="05000000000000000000" pitchFamily="2" charset="2"/>
-                            </a:rPr>
-                          </m:ctrlPr>
-                        </m:dPr>
-                        <m:e>
-                          <m:r>
-                            <a:rPr lang="en-GB" sz="1600" b="1" i="1" smtClean="0">
-                              <a:solidFill>
-                                <a:schemeClr val="bg1"/>
-                              </a:solidFill>
-                              <a:latin typeface="Cambria Math" panose="02040503050406030204" pitchFamily="18" charset="0"/>
-                              <a:sym typeface="Wingdings" panose="05000000000000000000" pitchFamily="2" charset="2"/>
-                            </a:rPr>
-                            <m:t>𝑮</m:t>
-                          </m:r>
-                          <m:r>
-                            <a:rPr lang="en-GB" sz="1600" b="1" i="0" smtClean="0">
-                              <a:solidFill>
-                                <a:schemeClr val="bg1"/>
-                              </a:solidFill>
-                              <a:latin typeface="Cambria Math" panose="02040503050406030204" pitchFamily="18" charset="0"/>
-                              <a:sym typeface="Wingdings" panose="05000000000000000000" pitchFamily="2" charset="2"/>
-                            </a:rPr>
-                            <m:t>−</m:t>
-                          </m:r>
-                          <m:r>
-                            <a:rPr lang="en-GB" sz="1600" b="1" i="1" smtClean="0">
-                              <a:solidFill>
-                                <a:schemeClr val="bg1"/>
-                              </a:solidFill>
-                              <a:latin typeface="Cambria Math" panose="02040503050406030204" pitchFamily="18" charset="0"/>
-                              <a:sym typeface="Wingdings" panose="05000000000000000000" pitchFamily="2" charset="2"/>
-                            </a:rPr>
-                            <m:t>𝑸</m:t>
-                          </m:r>
-                          <m:d>
-                            <m:dPr>
-                              <m:ctrlPr>
-                                <a:rPr lang="en-GB" sz="1600" b="1" i="1" smtClean="0">
-                                  <a:solidFill>
-                                    <a:schemeClr val="bg1"/>
-                                  </a:solidFill>
-                                  <a:latin typeface="Cambria Math" panose="02040503050406030204" pitchFamily="18" charset="0"/>
-                                  <a:sym typeface="Wingdings" panose="05000000000000000000" pitchFamily="2" charset="2"/>
-                                </a:rPr>
-                              </m:ctrlPr>
-                            </m:dPr>
-                            <m:e>
-                              <m:r>
-                                <a:rPr lang="en-GB" sz="1600" b="1" i="1" smtClean="0">
-                                  <a:solidFill>
-                                    <a:schemeClr val="bg1"/>
-                                  </a:solidFill>
-                                  <a:latin typeface="Cambria Math" panose="02040503050406030204" pitchFamily="18" charset="0"/>
-                                  <a:sym typeface="Wingdings" panose="05000000000000000000" pitchFamily="2" charset="2"/>
-                                </a:rPr>
-                                <m:t>𝑺</m:t>
-                              </m:r>
-                              <m:r>
-                                <a:rPr lang="en-GB" sz="1600" b="1" i="0" smtClean="0">
-                                  <a:solidFill>
-                                    <a:schemeClr val="bg1"/>
-                                  </a:solidFill>
-                                  <a:latin typeface="Cambria Math" panose="02040503050406030204" pitchFamily="18" charset="0"/>
-                                  <a:sym typeface="Wingdings" panose="05000000000000000000" pitchFamily="2" charset="2"/>
-                                </a:rPr>
-                                <m:t>,</m:t>
-                              </m:r>
-                              <m:r>
-                                <a:rPr lang="en-GB" sz="1600" b="1" i="1" smtClean="0">
-                                  <a:solidFill>
-                                    <a:schemeClr val="bg1"/>
-                                  </a:solidFill>
-                                  <a:latin typeface="Cambria Math" panose="02040503050406030204" pitchFamily="18" charset="0"/>
-                                  <a:sym typeface="Wingdings" panose="05000000000000000000" pitchFamily="2" charset="2"/>
-                                </a:rPr>
-                                <m:t>𝑨</m:t>
-                              </m:r>
-                            </m:e>
-                          </m:d>
-                        </m:e>
-                      </m:d>
-                    </m:oMath>
-                  </m:oMathPara>
-                </a14:m>
-                <a:br>
-                  <a:rPr lang="en-GB" sz="1600" b="1" dirty="0">
-                    <a:solidFill>
-                      <a:schemeClr val="bg1"/>
-                    </a:solidFill>
-                  </a:rPr>
-                </a:br>
-                <a:endParaRPr lang="en-GB" sz="1600" b="1" dirty="0">
-                  <a:solidFill>
-                    <a:schemeClr val="bg1"/>
-                  </a:solidFill>
-                </a:endParaRPr>
-              </a:p>
-              <a:p>
-                <a:br>
-                  <a:rPr lang="en-GB" sz="1600" b="1" dirty="0">
-                    <a:solidFill>
-                      <a:schemeClr val="bg1"/>
-                    </a:solidFill>
-                  </a:rPr>
-                </a:br>
-                <a:r>
-                  <a:rPr lang="en-GB" sz="1600" b="1" dirty="0">
-                    <a:solidFill>
-                      <a:schemeClr val="bg1"/>
-                    </a:solidFill>
-                  </a:rPr>
-                  <a:t>Every-Visit:</a:t>
-                </a:r>
-                <a:r>
-                  <a:rPr lang="en-GB" sz="1600" dirty="0">
-                    <a:solidFill>
-                      <a:schemeClr val="bg1"/>
-                    </a:solidFill>
-                  </a:rPr>
-                  <a:t> We update the Q-value </a:t>
-                </a:r>
-                <a:r>
-                  <a:rPr lang="en-GB" sz="1600" i="1" dirty="0">
-                    <a:solidFill>
-                      <a:schemeClr val="bg1"/>
-                    </a:solidFill>
-                  </a:rPr>
-                  <a:t>every time</a:t>
-                </a:r>
-                <a:r>
-                  <a:rPr lang="en-GB" sz="1600" dirty="0">
-                    <a:solidFill>
-                      <a:schemeClr val="bg1"/>
-                    </a:solidFill>
-                  </a:rPr>
-                  <a:t> a state is visited in the episode, not just the first time.</a:t>
-                </a:r>
-              </a:p>
-              <a:p>
-                <a:endParaRPr lang="en-GB" sz="1600" dirty="0">
-                  <a:solidFill>
-                    <a:schemeClr val="bg1"/>
-                  </a:solidFill>
-                </a:endParaRPr>
-              </a:p>
-            </p:txBody>
-          </p:sp>
-        </mc:Choice>
-        <mc:Fallback xmlns="">
-          <p:sp>
-            <p:nvSpPr>
-              <p:cNvPr id="2" name="TextBox 1">
-                <a:extLst>
-                  <a:ext uri="{FF2B5EF4-FFF2-40B4-BE49-F238E27FC236}">
-                    <a16:creationId xmlns:a16="http://schemas.microsoft.com/office/drawing/2014/main" id="{DD686CCE-D2A4-D843-663C-509241C80C8C}"/>
-                  </a:ext>
-                </a:extLst>
-              </p:cNvPr>
-              <p:cNvSpPr txBox="1">
-                <a:spLocks noRot="1" noChangeAspect="1" noMove="1" noResize="1" noEditPoints="1" noAdjustHandles="1" noChangeArrowheads="1" noChangeShapeType="1" noTextEdit="1"/>
-              </p:cNvSpPr>
-              <p:nvPr/>
-            </p:nvSpPr>
-            <p:spPr>
-              <a:xfrm>
-                <a:off x="380410" y="1006870"/>
-                <a:ext cx="6416630" cy="3785652"/>
-              </a:xfrm>
-              <a:prstGeom prst="rect">
-                <a:avLst/>
-              </a:prstGeom>
-              <a:blipFill>
-                <a:blip r:embed="rId3"/>
-                <a:stretch>
-                  <a:fillRect l="-475" t="-483" r="-665"/>
-                </a:stretch>
-              </a:blipFill>
-            </p:spPr>
-            <p:txBody>
-              <a:bodyPr/>
-              <a:lstStyle/>
-              <a:p>
-                <a:r>
-                  <a:rPr lang="en-GB">
-                    <a:noFill/>
-                  </a:rPr>
-                  <a:t> </a:t>
-                </a:r>
-              </a:p>
-            </p:txBody>
-          </p:sp>
-        </mc:Fallback>
-      </mc:AlternateContent>
-    </p:spTree>
-    <p:extLst>
-      <p:ext uri="{BB962C8B-B14F-4D97-AF65-F5344CB8AC3E}">
-        <p14:creationId xmlns:p14="http://schemas.microsoft.com/office/powerpoint/2010/main" val="4069822394"/>
       </p:ext>
     </p:extLst>
   </p:cSld>
@@ -10601,8 +10567,8 @@
           </a:effectLst>
         </p:spPr>
       </p:cxnSp>
-      <mc:AlternateContent xmlns:mc="http://schemas.openxmlformats.org/markup-compatibility/2006" xmlns:a14="http://schemas.microsoft.com/office/drawing/2010/main">
-        <mc:Choice Requires="a14">
+      <mc:AlternateContent xmlns:mc="http://schemas.openxmlformats.org/markup-compatibility/2006">
+        <mc:Choice xmlns:a14="http://schemas.microsoft.com/office/drawing/2010/main" Requires="a14">
           <p:sp>
             <p:nvSpPr>
               <p:cNvPr id="2" name="TextBox 1">
@@ -10808,7 +10774,7 @@
                 <a:r>
                   <a:rPr lang="en-GB" sz="1600" dirty="0">
                     <a:solidFill>
-                      <a:schemeClr val="bg1"/>
+                      <a:srgbClr val="FF0000"/>
                     </a:solidFill>
                   </a:rPr>
                   <a:t>Why Constant?</a:t>
@@ -10818,7 +10784,7 @@
                 <a:r>
                   <a:rPr lang="en-GB" sz="1600" b="1" i="0" dirty="0">
                     <a:solidFill>
-                      <a:srgbClr val="E3E3E3"/>
+                      <a:srgbClr val="FF0000"/>
                     </a:solidFill>
                     <a:effectLst/>
                     <a:latin typeface="Google Sans Flex"/>
@@ -10828,7 +10794,7 @@
                 <a:r>
                   <a:rPr lang="en-GB" sz="1600" b="0" i="0" dirty="0">
                     <a:solidFill>
-                      <a:srgbClr val="E3E3E3"/>
+                      <a:srgbClr val="FF0000"/>
                     </a:solidFill>
                     <a:effectLst/>
                     <a:latin typeface="Google Sans Flex"/>
@@ -10837,14 +10803,14 @@
                 </a:r>
                 <a:endParaRPr lang="en-GB" sz="1600" dirty="0">
                   <a:solidFill>
-                    <a:schemeClr val="bg1"/>
+                    <a:srgbClr val="FF0000"/>
                   </a:solidFill>
                 </a:endParaRPr>
               </a:p>
             </p:txBody>
           </p:sp>
         </mc:Choice>
-        <mc:Fallback xmlns="">
+        <mc:Fallback>
           <p:sp>
             <p:nvSpPr>
               <p:cNvPr id="2" name="TextBox 1">
@@ -10879,7 +10845,7 @@
               <a:lstStyle/>
               <a:p>
                 <a:r>
-                  <a:rPr lang="en-GB">
+                  <a:rPr lang="en-US">
                     <a:noFill/>
                   </a:rPr>
                   <a:t> </a:t>
@@ -11013,7 +10979,7 @@
         <p:spPr>
           <a:xfrm>
             <a:off x="342900" y="1272124"/>
-            <a:ext cx="6278880" cy="3323987"/>
+            <a:ext cx="6278880" cy="2831544"/>
           </a:xfrm>
           <a:prstGeom prst="rect">
             <a:avLst/>
@@ -11136,20 +11102,7 @@
                 <a:effectLst/>
                 <a:latin typeface="+mn-lt"/>
               </a:rPr>
-              <a:t>Based on the theoretical framework by Ng et al. (1999).</a:t>
-            </a:r>
-          </a:p>
-          <a:p>
-            <a:pPr algn="l"/>
-            <a:r>
-              <a:rPr lang="en-GB" sz="1600" b="0" i="0" dirty="0">
-                <a:solidFill>
-                  <a:srgbClr val="E3E3E3"/>
-                </a:solidFill>
-                <a:effectLst/>
-                <a:latin typeface="+mn-lt"/>
-              </a:rPr>
-              <a:t>Heuristic : We used the negative Manhattan Distance to the goal. As the agent gets closer, the reward is positive; if it moves away, it is negative.</a:t>
+              <a:t>We used the negative Manhattan Distance to the goal. As the agent gets closer, the reward is positive; if it moves away, it is negative.</a:t>
             </a:r>
           </a:p>
           <a:p>
@@ -11430,8 +11383,29 @@
                   <a:schemeClr val="bg1"/>
                 </a:solidFill>
               </a:rPr>
-              <a:t>Penalty of -0.5.</a:t>
+              <a:t>Penalty of -</a:t>
             </a:r>
+            <a:r>
+              <a:rPr lang="he-IL" sz="1600" b="1" dirty="0">
+                <a:solidFill>
+                  <a:schemeClr val="bg1"/>
+                </a:solidFill>
+              </a:rPr>
+              <a:t>1</a:t>
+            </a:r>
+            <a:r>
+              <a:rPr lang="ru-RU" sz="1600" b="1" dirty="0">
+                <a:solidFill>
+                  <a:schemeClr val="bg1"/>
+                </a:solidFill>
+              </a:rPr>
+              <a:t>.0</a:t>
+            </a:r>
+            <a:endParaRPr lang="en-GB" sz="1600" b="1" dirty="0">
+              <a:solidFill>
+                <a:schemeClr val="bg1"/>
+              </a:solidFill>
+            </a:endParaRPr>
           </a:p>
           <a:p>
             <a:endParaRPr lang="en-GB" sz="1600" b="1" dirty="0">

--- a/RL Final presentation.pptx
+++ b/RL Final presentation.pptx
@@ -7270,10 +7270,10 @@
       </p:cxnSp>
       <p:pic>
         <p:nvPicPr>
-          <p:cNvPr id="4" name="Picture 3" descr="A graph showing a line&#10;&#10;Description automatically generated">
+          <p:cNvPr id="8" name="Picture 7" descr="A graph showing a line&#10;&#10;Description automatically generated">
             <a:extLst>
               <a:ext uri="{FF2B5EF4-FFF2-40B4-BE49-F238E27FC236}">
-                <a16:creationId xmlns:a16="http://schemas.microsoft.com/office/drawing/2014/main" id="{23093507-9ABC-963C-5E60-633535B623B9}"/>
+                <a16:creationId xmlns:a16="http://schemas.microsoft.com/office/drawing/2014/main" id="{4663DFD6-770A-7912-CAA9-9F6FABBEF06F}"/>
               </a:ext>
             </a:extLst>
           </p:cNvPr>
@@ -7290,8 +7290,8 @@
         </p:blipFill>
         <p:spPr>
           <a:xfrm>
-            <a:off x="213510" y="1386425"/>
-            <a:ext cx="8557260" cy="2457808"/>
+            <a:off x="171709" y="1192887"/>
+            <a:ext cx="8640000" cy="2481573"/>
           </a:xfrm>
           <a:prstGeom prst="rect">
             <a:avLst/>
@@ -7409,10 +7409,10 @@
       </p:cxnSp>
       <p:pic>
         <p:nvPicPr>
-          <p:cNvPr id="4" name="Picture 3" descr="A graph showing a line&#10;&#10;Description automatically generated">
+          <p:cNvPr id="7" name="Picture 6" descr="A graph showing a line&#10;&#10;Description automatically generated">
             <a:extLst>
               <a:ext uri="{FF2B5EF4-FFF2-40B4-BE49-F238E27FC236}">
-                <a16:creationId xmlns:a16="http://schemas.microsoft.com/office/drawing/2014/main" id="{FD6AAACD-573A-D5EA-8E6F-5127014BF453}"/>
+                <a16:creationId xmlns:a16="http://schemas.microsoft.com/office/drawing/2014/main" id="{A7491076-9705-CC95-DAB1-378B3AF6F570}"/>
               </a:ext>
             </a:extLst>
           </p:cNvPr>
@@ -7429,8 +7429,8 @@
         </p:blipFill>
         <p:spPr>
           <a:xfrm>
-            <a:off x="210170" y="1344515"/>
-            <a:ext cx="8723660" cy="2505601"/>
+            <a:off x="252000" y="1275503"/>
+            <a:ext cx="8640000" cy="2481573"/>
           </a:xfrm>
           <a:prstGeom prst="rect">
             <a:avLst/>
@@ -7503,7 +7503,7 @@
             </a:pPr>
             <a:r>
               <a:rPr lang="en-GB" dirty="0"/>
-              <a:t>Sensitive SARSA Gamma</a:t>
+              <a:t>Sensitive SARSA Epsilon</a:t>
             </a:r>
             <a:endParaRPr dirty="0">
               <a:solidFill>
@@ -7548,10 +7548,10 @@
       </p:cxnSp>
       <p:pic>
         <p:nvPicPr>
-          <p:cNvPr id="4" name="Picture 3" descr="A graph showing a line&#10;&#10;Description automatically generated">
+          <p:cNvPr id="6" name="Picture 5" descr="A graph showing a line&#10;&#10;Description automatically generated">
             <a:extLst>
               <a:ext uri="{FF2B5EF4-FFF2-40B4-BE49-F238E27FC236}">
-                <a16:creationId xmlns:a16="http://schemas.microsoft.com/office/drawing/2014/main" id="{2BE836D2-3F33-4633-9FCC-C4A57470B478}"/>
+                <a16:creationId xmlns:a16="http://schemas.microsoft.com/office/drawing/2014/main" id="{96E6AB6A-BD51-F0A8-A80A-319F32B902E7}"/>
               </a:ext>
             </a:extLst>
           </p:cNvPr>
@@ -7568,8 +7568,8 @@
         </p:blipFill>
         <p:spPr>
           <a:xfrm>
-            <a:off x="312420" y="1325933"/>
-            <a:ext cx="8675028" cy="2491633"/>
+            <a:off x="168872" y="1330963"/>
+            <a:ext cx="8640000" cy="2481573"/>
           </a:xfrm>
           <a:prstGeom prst="rect">
             <a:avLst/>
@@ -7642,7 +7642,7 @@
             </a:pPr>
             <a:r>
               <a:rPr lang="en-GB" dirty="0"/>
-              <a:t>Sensitive MC Gamma</a:t>
+              <a:t>Sensitive MC Epsilon</a:t>
             </a:r>
             <a:endParaRPr dirty="0">
               <a:solidFill>
@@ -7687,10 +7687,10 @@
       </p:cxnSp>
       <p:pic>
         <p:nvPicPr>
-          <p:cNvPr id="4" name="Picture 3" descr="A graph showing a line&#10;&#10;Description automatically generated">
+          <p:cNvPr id="6" name="Picture 5" descr="A graph showing a line&#10;&#10;Description automatically generated">
             <a:extLst>
               <a:ext uri="{FF2B5EF4-FFF2-40B4-BE49-F238E27FC236}">
-                <a16:creationId xmlns:a16="http://schemas.microsoft.com/office/drawing/2014/main" id="{97BA8B6C-E642-0E45-C1EC-9F73277AA128}"/>
+                <a16:creationId xmlns:a16="http://schemas.microsoft.com/office/drawing/2014/main" id="{E5EE5454-D9D5-99A7-1B3B-D735E8D6C125}"/>
               </a:ext>
             </a:extLst>
           </p:cNvPr>
@@ -7707,8 +7707,8 @@
         </p:blipFill>
         <p:spPr>
           <a:xfrm>
-            <a:off x="152400" y="1207021"/>
-            <a:ext cx="8686800" cy="2495014"/>
+            <a:off x="187037" y="1386425"/>
+            <a:ext cx="8640000" cy="2481573"/>
           </a:xfrm>
           <a:prstGeom prst="rect">
             <a:avLst/>
@@ -8130,8 +8130,8 @@
         </p:nvSpPr>
         <p:spPr>
           <a:xfrm>
-            <a:off x="651305" y="1652010"/>
-            <a:ext cx="6763470" cy="2739211"/>
+            <a:off x="367286" y="1610446"/>
+            <a:ext cx="7197295" cy="3016210"/>
           </a:xfrm>
           <a:prstGeom prst="rect">
             <a:avLst/>
@@ -8176,7 +8176,7 @@
                 <a:effectLst/>
                 <a:latin typeface="+mn-lt"/>
               </a:rPr>
-              <a:t>0.1 (Optimal): Best balance of speed and stability.</a:t>
+              <a:t>0.1 (Optimal): Best balance of exploration speed and final stability.</a:t>
             </a:r>
           </a:p>
           <a:p>
@@ -8189,7 +8189,7 @@
                 <a:effectLst/>
                 <a:latin typeface="+mn-lt"/>
               </a:rPr>
-              <a:t>0.05: Too slow.</a:t>
+              <a:t>0.05: Too conservative, slow convergence to the goal.</a:t>
             </a:r>
           </a:p>
           <a:p>
@@ -8202,7 +8202,7 @@
                 <a:effectLst/>
                 <a:latin typeface="+mn-lt"/>
               </a:rPr>
-              <a:t>0.2: Too unstable.</a:t>
+              <a:t>0.2: Too random, excessive exploration degrades final performance.</a:t>
             </a:r>
           </a:p>
           <a:p>
@@ -8225,43 +8225,68 @@
                 <a:effectLst/>
                 <a:latin typeface="+mn-lt"/>
               </a:rPr>
-              <a:t>Discount Factor (Gamma):</a:t>
+              <a:t>Exploration Rate (Epsilon)</a:t>
             </a:r>
-          </a:p>
-          <a:p>
-            <a:pPr algn="l"/>
-            <a:endParaRPr lang="en-GB" sz="1600" b="0" i="0" dirty="0">
-              <a:solidFill>
-                <a:srgbClr val="E3E3E3"/>
-              </a:solidFill>
-              <a:effectLst/>
-              <a:latin typeface="+mn-lt"/>
-            </a:endParaRPr>
-          </a:p>
-          <a:p>
-            <a:pPr algn="l"/>
             <a:r>
-              <a:rPr lang="en-GB" sz="1600" b="0" i="0" dirty="0">
+              <a:rPr lang="he-IL" sz="1600" b="0" i="0" u="sng" dirty="0">
                 <a:solidFill>
                   <a:srgbClr val="E3E3E3"/>
                 </a:solidFill>
                 <a:effectLst/>
                 <a:latin typeface="+mn-lt"/>
               </a:rPr>
-              <a:t>1.0 (Optimal): Essential for long paths to the goal.</a:t>
+              <a:t>:</a:t>
             </a:r>
           </a:p>
           <a:p>
             <a:pPr algn="l"/>
+            <a:endParaRPr lang="he-IL" sz="1200" b="1" dirty="0">
+              <a:solidFill>
+                <a:schemeClr val="bg1"/>
+              </a:solidFill>
+              <a:latin typeface="+mn-lt"/>
+            </a:endParaRPr>
+          </a:p>
+          <a:p>
             <a:r>
-              <a:rPr lang="en-GB" sz="1600" b="0" i="0" dirty="0">
-                <a:solidFill>
-                  <a:srgbClr val="E3E3E3"/>
-                </a:solidFill>
-                <a:effectLst/>
+              <a:rPr lang="en-GB" sz="1600" dirty="0">
+                <a:solidFill>
+                  <a:schemeClr val="bg1"/>
+                </a:solidFill>
                 <a:latin typeface="+mn-lt"/>
               </a:rPr>
-              <a:t>0.95: Signal decays too fast; agent gets lost.</a:t>
+              <a:t>0.1 (Optimal): Best balance of exploration speed and policy stability.</a:t>
+            </a:r>
+          </a:p>
+          <a:p>
+            <a:r>
+              <a:rPr lang="en-GB" sz="1600" dirty="0">
+                <a:solidFill>
+                  <a:schemeClr val="bg1"/>
+                </a:solidFill>
+                <a:latin typeface="+mn-lt"/>
+              </a:rPr>
+              <a:t>0.05: Too conservative, results in slow convergence.</a:t>
+            </a:r>
+          </a:p>
+          <a:p>
+            <a:r>
+              <a:rPr lang="en-GB" sz="1600" dirty="0">
+                <a:solidFill>
+                  <a:schemeClr val="bg1"/>
+                </a:solidFill>
+                <a:latin typeface="+mn-lt"/>
+              </a:rPr>
+              <a:t>0.2: Too random, degrades final performance due to excessive exploration</a:t>
+            </a:r>
+            <a:r>
+              <a:rPr lang="en-GB" sz="1200" b="1" dirty="0">
+                <a:solidFill>
+                  <a:schemeClr val="bg1"/>
+                </a:solidFill>
+                <a:latin typeface="+mn-lt"/>
+              </a:rPr>
+              <a:t>.</a:t>
             </a:r>
           </a:p>
           <a:p>
@@ -8397,7 +8422,7 @@
         </p:nvSpPr>
         <p:spPr>
           <a:xfrm>
-            <a:off x="468425" y="1213686"/>
+            <a:off x="461497" y="1386425"/>
             <a:ext cx="6763470" cy="2716128"/>
           </a:xfrm>
           <a:prstGeom prst="rect">
@@ -8907,7 +8932,7 @@
                   <a:schemeClr val="bg1"/>
                 </a:solidFill>
               </a:rPr>
-              <a:t>- Reward = +1</a:t>
+              <a:t>Reward = +1</a:t>
             </a:r>
             <a:r>
               <a:rPr lang="en-GB" sz="1600" dirty="0">
@@ -8940,7 +8965,7 @@
                   <a:schemeClr val="bg1"/>
                 </a:solidFill>
               </a:rPr>
-              <a:t>- Reward = 0</a:t>
+              <a:t>Reward = 0</a:t>
             </a:r>
             <a:r>
               <a:rPr lang="en-GB" sz="1600" dirty="0">
@@ -9145,8 +9170,8 @@
           </a:effectLst>
         </p:spPr>
       </p:cxnSp>
-      <mc:AlternateContent xmlns:mc="http://schemas.openxmlformats.org/markup-compatibility/2006">
-        <mc:Choice xmlns:a14="http://schemas.microsoft.com/office/drawing/2010/main" Requires="a14">
+      <mc:AlternateContent xmlns:mc="http://schemas.openxmlformats.org/markup-compatibility/2006" xmlns:a14="http://schemas.microsoft.com/office/drawing/2010/main">
+        <mc:Choice Requires="a14">
           <p:sp>
             <p:nvSpPr>
               <p:cNvPr id="2" name="TextBox 1">
@@ -9275,7 +9300,7 @@
                       <a:schemeClr val="bg1"/>
                     </a:solidFill>
                   </a:rPr>
-                  <a:t>Instead of calculating a simple average of all past returns, we use a Constant</a:t>
+                  <a:t>Instead of calculating a simple average of all past returns (Theoretical approach), we use a Constant</a:t>
                 </a:r>
                 <a:r>
                   <a:rPr lang="he-IL" sz="1600" dirty="0">
@@ -9628,7 +9653,7 @@
             </p:txBody>
           </p:sp>
         </mc:Choice>
-        <mc:Fallback>
+        <mc:Fallback xmlns="">
           <p:sp>
             <p:nvSpPr>
               <p:cNvPr id="2" name="TextBox 1">
@@ -9663,7 +9688,7 @@
               <a:lstStyle/>
               <a:p>
                 <a:r>
-                  <a:rPr lang="en-US">
+                  <a:rPr lang="en-GB">
                     <a:noFill/>
                   </a:rPr>
                   <a:t> </a:t>
@@ -10328,13 +10353,13 @@
                             </m:dPr>
                             <m:e>
                               <m:r>
-                                <a:rPr lang="en-GB" sz="1600" b="1" i="1" dirty="0">
+                                <a:rPr lang="en-US" sz="1600" b="1" i="1" dirty="0" smtClean="0">
                                   <a:solidFill>
                                     <a:schemeClr val="bg1"/>
                                   </a:solidFill>
                                   <a:latin typeface="Cambria Math" panose="02040503050406030204" pitchFamily="18" charset="0"/>
                                 </a:rPr>
-                                <m:t>𝑠</m:t>
+                                <m:t>𝑺</m:t>
                               </m:r>
                               <m:r>
                                 <a:rPr lang="en-GB" sz="1600" b="1" i="0" dirty="0">
@@ -10440,7 +10465,7 @@
               <a:lstStyle/>
               <a:p>
                 <a:r>
-                  <a:rPr lang="en-US">
+                  <a:rPr lang="en-GB">
                     <a:noFill/>
                   </a:rPr>
                   <a:t> </a:t>
@@ -10583,8 +10608,8 @@
             </p:nvSpPr>
             <p:spPr>
               <a:xfrm>
-                <a:off x="548640" y="1436269"/>
-                <a:ext cx="5219700" cy="3293209"/>
+                <a:off x="576349" y="1720287"/>
+                <a:ext cx="5219700" cy="2308324"/>
               </a:xfrm>
               <a:prstGeom prst="rect">
                 <a:avLst/>
@@ -10770,43 +10795,6 @@
                   </a:solidFill>
                 </a:endParaRPr>
               </a:p>
-              <a:p>
-                <a:r>
-                  <a:rPr lang="en-GB" sz="1600" dirty="0">
-                    <a:solidFill>
-                      <a:srgbClr val="FF0000"/>
-                    </a:solidFill>
-                  </a:rPr>
-                  <a:t>Why Constant?</a:t>
-                </a:r>
-              </a:p>
-              <a:p>
-                <a:r>
-                  <a:rPr lang="en-GB" sz="1600" b="1" i="0" dirty="0">
-                    <a:solidFill>
-                      <a:srgbClr val="FF0000"/>
-                    </a:solidFill>
-                    <a:effectLst/>
-                    <a:latin typeface="Google Sans Flex"/>
-                  </a:rPr>
-                  <a:t>Theory vs. Practice:</a:t>
-                </a:r>
-                <a:r>
-                  <a:rPr lang="en-GB" sz="1600" b="0" i="0" dirty="0">
-                    <a:solidFill>
-                      <a:srgbClr val="FF0000"/>
-                    </a:solidFill>
-                    <a:effectLst/>
-                    <a:latin typeface="Google Sans Flex"/>
-                  </a:rPr>
-                  <a:t> Theoretically, a decaying learning rate (1/N) guarantees convergence. However, it causes the agent to stop learning over time</a:t>
-                </a:r>
-                <a:endParaRPr lang="en-GB" sz="1600" dirty="0">
-                  <a:solidFill>
-                    <a:srgbClr val="FF0000"/>
-                  </a:solidFill>
-                </a:endParaRPr>
-              </a:p>
             </p:txBody>
           </p:sp>
         </mc:Choice>
@@ -10827,8 +10815,8 @@
             </p:nvSpPr>
             <p:spPr>
               <a:xfrm>
-                <a:off x="548640" y="1436269"/>
-                <a:ext cx="5219700" cy="3293209"/>
+                <a:off x="576349" y="1720287"/>
+                <a:ext cx="5219700" cy="2308324"/>
               </a:xfrm>
               <a:prstGeom prst="rect">
                 <a:avLst/>
@@ -10836,7 +10824,7 @@
               <a:blipFill>
                 <a:blip r:embed="rId3"/>
                 <a:stretch>
-                  <a:fillRect l="-584" t="-556" r="-701" b="-1481"/>
+                  <a:fillRect l="-701" t="-792"/>
                 </a:stretch>
               </a:blipFill>
             </p:spPr>
@@ -10845,7 +10833,7 @@
               <a:lstStyle/>
               <a:p>
                 <a:r>
-                  <a:rPr lang="en-US">
+                  <a:rPr lang="en-GB">
                     <a:noFill/>
                   </a:rPr>
                   <a:t> </a:t>
@@ -11383,29 +11371,8 @@
                   <a:schemeClr val="bg1"/>
                 </a:solidFill>
               </a:rPr>
-              <a:t>Penalty of -</a:t>
+              <a:t>Penalty of -0.5.</a:t>
             </a:r>
-            <a:r>
-              <a:rPr lang="he-IL" sz="1600" b="1" dirty="0">
-                <a:solidFill>
-                  <a:schemeClr val="bg1"/>
-                </a:solidFill>
-              </a:rPr>
-              <a:t>1</a:t>
-            </a:r>
-            <a:r>
-              <a:rPr lang="ru-RU" sz="1600" b="1" dirty="0">
-                <a:solidFill>
-                  <a:schemeClr val="bg1"/>
-                </a:solidFill>
-              </a:rPr>
-              <a:t>.0</a:t>
-            </a:r>
-            <a:endParaRPr lang="en-GB" sz="1600" b="1" dirty="0">
-              <a:solidFill>
-                <a:schemeClr val="bg1"/>
-              </a:solidFill>
-            </a:endParaRPr>
           </a:p>
           <a:p>
             <a:endParaRPr lang="en-GB" sz="1600" b="1" dirty="0">
